--- a/Traders Final Project - Finished.pptx
+++ b/Traders Final Project - Finished.pptx
@@ -348,7 +348,7 @@
   <p1510:revLst>
     <p1510:client id="{03649AC3-76D5-3ED2-290D-C223553D5CAB}" v="6" dt="2025-04-30T13:12:02.527"/>
     <p1510:client id="{0B0E86BA-7640-2645-BA7B-5838925819FF}" v="1988" dt="2025-04-30T16:32:50.033"/>
-    <p1510:client id="{2A5FA87A-BF05-32B9-9780-02A5D7FE987F}" v="126" dt="2025-04-30T18:48:14.188"/>
+    <p1510:client id="{2A5FA87A-BF05-32B9-9780-02A5D7FE987F}" v="188" dt="2025-04-30T19:33:12.418"/>
     <p1510:client id="{47B53135-CE3E-22D9-18A6-E1881EC2AE38}" v="189" dt="2025-04-30T04:48:27.239"/>
     <p1510:client id="{D53F135F-7B07-91F5-0DFF-B832C391E11A}" v="17" dt="2025-04-29T21:23:24.106"/>
     <p1510:client id="{DAAD7A25-3863-4050-AFCA-BC8069ADCBC4}" v="1171" dt="2025-04-30T17:55:06.943"/>
@@ -5592,7 +5592,7 @@
           </a:ln>
           <a:extLst>
             <a:ext uri="{C572A759-6A51-4108-AA02-DFA0A04FC94B}">
-              <ma14:wrappingTextBoxFlag xmlns="" xmlns:lc="http://schemas.openxmlformats.org/drawingml/2006/lockedCanvas" xmlns:ma14="http://schemas.microsoft.com/office/mac/drawingml/2011/main" xmlns:a14="http://schemas.microsoft.com/office/drawing/2010/main" xmlns:m="http://schemas.openxmlformats.org/officeDocument/2006/math" val="1"/>
+              <ma14:wrappingTextBoxFlag xmlns:m="http://schemas.openxmlformats.org/officeDocument/2006/math" xmlns:a14="http://schemas.microsoft.com/office/drawing/2010/main" xmlns:ma14="http://schemas.microsoft.com/office/mac/drawingml/2011/main" xmlns:lc="http://schemas.openxmlformats.org/drawingml/2006/lockedCanvas" xmlns="" val="1"/>
             </a:ext>
           </a:extLst>
         </p:spPr>
@@ -6169,7 +6169,7 @@
           </a:ln>
           <a:extLst>
             <a:ext uri="{C572A759-6A51-4108-AA02-DFA0A04FC94B}">
-              <ma14:wrappingTextBoxFlag xmlns="" xmlns:ma14="http://schemas.microsoft.com/office/mac/drawingml/2011/main" xmlns:a14="http://schemas.microsoft.com/office/drawing/2010/main" xmlns:m="http://schemas.openxmlformats.org/officeDocument/2006/math" val="1"/>
+              <ma14:wrappingTextBoxFlag xmlns:m="http://schemas.openxmlformats.org/officeDocument/2006/math" xmlns:a14="http://schemas.microsoft.com/office/drawing/2010/main" xmlns:ma14="http://schemas.microsoft.com/office/mac/drawingml/2011/main" xmlns="" val="1"/>
             </a:ext>
           </a:extLst>
         </p:spPr>
@@ -6210,7 +6210,7 @@
           </a:ln>
           <a:extLst>
             <a:ext uri="{C572A759-6A51-4108-AA02-DFA0A04FC94B}">
-              <ma14:wrappingTextBoxFlag xmlns="" xmlns:ma14="http://schemas.microsoft.com/office/mac/drawingml/2011/main" xmlns:a14="http://schemas.microsoft.com/office/drawing/2010/main" xmlns:m="http://schemas.openxmlformats.org/officeDocument/2006/math" val="1"/>
+              <ma14:wrappingTextBoxFlag xmlns:m="http://schemas.openxmlformats.org/officeDocument/2006/math" xmlns:a14="http://schemas.microsoft.com/office/drawing/2010/main" xmlns:ma14="http://schemas.microsoft.com/office/mac/drawingml/2011/main" xmlns="" val="1"/>
             </a:ext>
           </a:extLst>
         </p:spPr>
@@ -8540,12 +8540,26 @@
         </p:nvSpPr>
         <p:spPr/>
         <p:txBody>
-          <a:bodyPr>
+          <a:bodyPr lIns="0" tIns="45719" rIns="45719" bIns="45719" anchor="t">
             <a:normAutofit lnSpcReduction="10000"/>
           </a:bodyPr>
           <a:lstStyle/>
           <a:p>
-            <a:endParaRPr lang="en-US"/>
+            <a:r>
+              <a:rPr lang="en-US" dirty="0">
+                <a:latin typeface="Poppins Medium"/>
+                <a:cs typeface="Poppins Medium"/>
+              </a:rPr>
+              <a:t>Lucas Bernal, Will Zimmer, Aryan </a:t>
+            </a:r>
+            <a:r>
+              <a:rPr lang="en-US" dirty="0" err="1">
+                <a:latin typeface="Poppins Medium"/>
+                <a:cs typeface="Poppins Medium"/>
+              </a:rPr>
+              <a:t>Bonigala</a:t>
+            </a:r>
+            <a:endParaRPr lang="en-US" dirty="0" err="1"/>
           </a:p>
         </p:txBody>
       </p:sp>
@@ -9248,8 +9262,8 @@
   <p:clrMapOvr>
     <a:masterClrMapping/>
   </p:clrMapOvr>
-  <mc:AlternateContent xmlns:mc="http://schemas.openxmlformats.org/markup-compatibility/2006" xmlns:p14="http://schemas.microsoft.com/office/powerpoint/2010/main">
-    <mc:Choice Requires="p14">
+  <mc:AlternateContent xmlns:mc="http://schemas.openxmlformats.org/markup-compatibility/2006">
+    <mc:Choice xmlns:p14="http://schemas.microsoft.com/office/powerpoint/2010/main" Requires="p14">
       <p:timing>
         <p:tnLst>
           <p:par>
@@ -9398,7 +9412,7 @@
         </p:bldLst>
       </p:timing>
     </mc:Choice>
-    <mc:Fallback xmlns="">
+    <mc:Fallback>
       <p:timing>
         <p:tnLst>
           <p:par>
@@ -9508,7 +9522,7 @@
                                               </p:endCondLst>
                                             </p:cTn>
                                             <p:tgtEl>
-                                              <p:sndTgt r:embed="rId5" name="hammer.wav"/>
+                                              <p:sndTgt r:embed="rId2" name="hammer.wav"/>
                                             </p:tgtEl>
                                           </p:cMediaNode>
                                         </p:audio>
@@ -10096,8 +10110,8 @@
   <p:clrMapOvr>
     <a:masterClrMapping/>
   </p:clrMapOvr>
-  <mc:AlternateContent xmlns:mc="http://schemas.openxmlformats.org/markup-compatibility/2006" xmlns:p14="http://schemas.microsoft.com/office/powerpoint/2010/main">
-    <mc:Choice Requires="p14">
+  <mc:AlternateContent xmlns:mc="http://schemas.openxmlformats.org/markup-compatibility/2006">
+    <mc:Choice xmlns:p14="http://schemas.microsoft.com/office/powerpoint/2010/main" Requires="p14">
       <p:timing>
         <p:tnLst>
           <p:par>
@@ -10246,7 +10260,7 @@
         </p:bldLst>
       </p:timing>
     </mc:Choice>
-    <mc:Fallback xmlns="">
+    <mc:Fallback>
       <p:timing>
         <p:tnLst>
           <p:par>
@@ -10356,7 +10370,7 @@
                                               </p:endCondLst>
                                             </p:cTn>
                                             <p:tgtEl>
-                                              <p:sndTgt r:embed="rId8" name="hammer.wav"/>
+                                              <p:sndTgt r:embed="rId3" name="hammer.wav"/>
                                             </p:tgtEl>
                                           </p:cMediaNode>
                                         </p:audio>
@@ -10798,13 +10812,13 @@
           <a:lstStyle/>
           <a:p>
             <a:r>
-              <a:rPr lang="en-US" dirty="0">
+              <a:rPr lang="en-US">
                 <a:latin typeface="Inter"/>
                 <a:cs typeface="Poppins SemiBold"/>
               </a:rPr>
               <a:t>Conclusion </a:t>
             </a:r>
-            <a:endParaRPr lang="en-US" dirty="0"/>
+            <a:endParaRPr lang="en-US"/>
           </a:p>
         </p:txBody>
       </p:sp>
@@ -11222,13 +11236,13 @@
           <a:lstStyle/>
           <a:p>
             <a:r>
-              <a:rPr lang="en-US" dirty="0">
+              <a:rPr lang="en-US">
                 <a:latin typeface="Inter"/>
                 <a:cs typeface="Poppins SemiBold"/>
               </a:rPr>
               <a:t>Future Work </a:t>
             </a:r>
-            <a:endParaRPr lang="en-US" dirty="0"/>
+            <a:endParaRPr lang="en-US"/>
           </a:p>
         </p:txBody>
       </p:sp>
@@ -13092,7 +13106,7 @@
             <a:pPr marL="0" indent="0">
               <a:buNone/>
             </a:pPr>
-            <a:endParaRPr lang="en-US" dirty="0"/>
+            <a:endParaRPr lang="en-US"/>
           </a:p>
         </p:txBody>
       </p:sp>
@@ -13125,7 +13139,7 @@
           <a:lstStyle/>
           <a:p>
             <a:r>
-              <a:rPr lang="en-US" dirty="0">
+              <a:rPr lang="en-US">
                 <a:latin typeface="Inter"/>
                 <a:cs typeface="Poppins"/>
               </a:rPr>
@@ -13134,7 +13148,7 @@
           </a:p>
           <a:p>
             <a:r>
-              <a:rPr lang="en-US" dirty="0">
+              <a:rPr lang="en-US">
                 <a:latin typeface="Inter"/>
                 <a:cs typeface="Poppins"/>
               </a:rPr>
@@ -13143,7 +13157,7 @@
           </a:p>
           <a:p>
             <a:r>
-              <a:rPr lang="en-US" dirty="0">
+              <a:rPr lang="en-US">
                 <a:latin typeface="Inter"/>
                 <a:cs typeface="Poppins"/>
               </a:rPr>
@@ -13151,7 +13165,7 @@
             </a:r>
           </a:p>
           <a:p>
-            <a:endParaRPr lang="en-US" dirty="0"/>
+            <a:endParaRPr lang="en-US"/>
           </a:p>
         </p:txBody>
       </p:sp>
@@ -13232,13 +13246,13 @@
           <a:lstStyle/>
           <a:p>
             <a:r>
-              <a:rPr lang="en-US" dirty="0">
+              <a:rPr lang="en-US">
                 <a:latin typeface="Inter"/>
                 <a:cs typeface="Poppins SemiBold"/>
               </a:rPr>
               <a:t>Hypothesis</a:t>
             </a:r>
-            <a:endParaRPr lang="en-US" dirty="0"/>
+            <a:endParaRPr lang="en-US"/>
           </a:p>
         </p:txBody>
       </p:sp>
@@ -13580,7 +13594,7 @@
               <a:buNone/>
             </a:pPr>
             <a:r>
-              <a:rPr lang="en-US" sz="6000" b="1" dirty="0">
+              <a:rPr lang="en-US" sz="6000" b="1">
                 <a:solidFill>
                   <a:schemeClr val="bg1"/>
                 </a:solidFill>
@@ -13589,7 +13603,7 @@
               </a:rPr>
               <a:t>Research Question</a:t>
             </a:r>
-            <a:endParaRPr lang="en-US" dirty="0"/>
+            <a:endParaRPr lang="en-US"/>
           </a:p>
         </p:txBody>
       </p:sp>
@@ -13931,7 +13945,7 @@
               <a:buNone/>
             </a:pPr>
             <a:r>
-              <a:rPr lang="en-US" sz="6000" b="1" dirty="0">
+              <a:rPr lang="en-US" sz="6000" b="1">
                 <a:solidFill>
                   <a:schemeClr val="bg1"/>
                 </a:solidFill>
@@ -13940,7 +13954,7 @@
               </a:rPr>
               <a:t>Hypothesis</a:t>
             </a:r>
-            <a:endParaRPr lang="en-US" dirty="0"/>
+            <a:endParaRPr lang="en-US"/>
           </a:p>
         </p:txBody>
       </p:sp>
@@ -19758,6 +19772,15 @@
 </file>
 
 <file path=customXml/item1.xml><?xml version="1.0" encoding="utf-8"?>
+<?mso-contentType ?>
+<FormTemplates xmlns="http://schemas.microsoft.com/sharepoint/v3/contenttype/forms">
+  <Display>DocumentLibraryForm</Display>
+  <Edit>DocumentLibraryForm</Edit>
+  <New>DocumentLibraryForm</New>
+</FormTemplates>
+</file>
+
+<file path=customXml/item2.xml><?xml version="1.0" encoding="utf-8"?>
 <p:properties xmlns:p="http://schemas.microsoft.com/office/2006/metadata/properties" xmlns:xsi="http://www.w3.org/2001/XMLSchema-instance" xmlns:pc="http://schemas.microsoft.com/office/infopath/2007/PartnerControls">
   <documentManagement>
     <TaxCatchAll xmlns="096a6368-7521-4ee3-8a8d-a1311be675ab" xsi:nil="true"/>
@@ -19766,15 +19789,6 @@
     </lcf76f155ced4ddcb4097134ff3c332f>
   </documentManagement>
 </p:properties>
-</file>
-
-<file path=customXml/item2.xml><?xml version="1.0" encoding="utf-8"?>
-<?mso-contentType ?>
-<FormTemplates xmlns="http://schemas.microsoft.com/sharepoint/v3/contenttype/forms">
-  <Display>DocumentLibraryForm</Display>
-  <Edit>DocumentLibraryForm</Edit>
-  <New>DocumentLibraryForm</New>
-</FormTemplates>
 </file>
 
 <file path=customXml/item3.xml><?xml version="1.0" encoding="utf-8"?>
@@ -19979,6 +19993,14 @@
 </file>
 
 <file path=customXml/itemProps1.xml><?xml version="1.0" encoding="utf-8"?>
+<ds:datastoreItem xmlns:ds="http://schemas.openxmlformats.org/officeDocument/2006/customXml" ds:itemID="{ABADD460-6E7B-447D-965A-9247448391A5}">
+  <ds:schemaRefs>
+    <ds:schemaRef ds:uri="http://schemas.microsoft.com/sharepoint/v3/contenttype/forms"/>
+  </ds:schemaRefs>
+</ds:datastoreItem>
+</file>
+
+<file path=customXml/itemProps2.xml><?xml version="1.0" encoding="utf-8"?>
 <ds:datastoreItem xmlns:ds="http://schemas.openxmlformats.org/officeDocument/2006/customXml" ds:itemID="{5579851F-D594-4436-AA2A-42EDEC9C9E16}">
   <ds:schemaRefs>
     <ds:schemaRef ds:uri="096a6368-7521-4ee3-8a8d-a1311be675ab"/>
@@ -19991,14 +20013,6 @@
     <ds:schemaRef ds:uri="http://schemas.microsoft.com/office/infopath/2007/PartnerControls"/>
     <ds:schemaRef ds:uri="http://schemas.openxmlformats.org/package/2006/metadata/core-properties"/>
     <ds:schemaRef ds:uri="http://www.w3.org/XML/1998/namespace"/>
-  </ds:schemaRefs>
-</ds:datastoreItem>
-</file>
-
-<file path=customXml/itemProps2.xml><?xml version="1.0" encoding="utf-8"?>
-<ds:datastoreItem xmlns:ds="http://schemas.openxmlformats.org/officeDocument/2006/customXml" ds:itemID="{ABADD460-6E7B-447D-965A-9247448391A5}">
-  <ds:schemaRefs>
-    <ds:schemaRef ds:uri="http://schemas.microsoft.com/sharepoint/v3/contenttype/forms"/>
   </ds:schemaRefs>
 </ds:datastoreItem>
 </file>

--- a/Traders Final Project - Finished.pptx
+++ b/Traders Final Project - Finished.pptx
@@ -348,7 +348,7 @@
   <p1510:revLst>
     <p1510:client id="{03649AC3-76D5-3ED2-290D-C223553D5CAB}" v="6" dt="2025-04-30T13:12:02.527"/>
     <p1510:client id="{0B0E86BA-7640-2645-BA7B-5838925819FF}" v="1988" dt="2025-04-30T16:32:50.033"/>
-    <p1510:client id="{2A5FA87A-BF05-32B9-9780-02A5D7FE987F}" v="188" dt="2025-04-30T19:33:12.418"/>
+    <p1510:client id="{2A5FA87A-BF05-32B9-9780-02A5D7FE987F}" v="193" dt="2025-04-30T20:36:49.287"/>
     <p1510:client id="{47B53135-CE3E-22D9-18A6-E1881EC2AE38}" v="189" dt="2025-04-30T04:48:27.239"/>
     <p1510:client id="{D53F135F-7B07-91F5-0DFF-B832C391E11A}" v="17" dt="2025-04-29T21:23:24.106"/>
     <p1510:client id="{DAAD7A25-3863-4050-AFCA-BC8069ADCBC4}" v="1171" dt="2025-04-30T17:55:06.943"/>
@@ -5592,7 +5592,7 @@
           </a:ln>
           <a:extLst>
             <a:ext uri="{C572A759-6A51-4108-AA02-DFA0A04FC94B}">
-              <ma14:wrappingTextBoxFlag xmlns:m="http://schemas.openxmlformats.org/officeDocument/2006/math" xmlns:a14="http://schemas.microsoft.com/office/drawing/2010/main" xmlns:ma14="http://schemas.microsoft.com/office/mac/drawingml/2011/main" xmlns:lc="http://schemas.openxmlformats.org/drawingml/2006/lockedCanvas" xmlns="" val="1"/>
+              <ma14:wrappingTextBoxFlag xmlns:lc="http://schemas.openxmlformats.org/drawingml/2006/lockedCanvas" xmlns:ma14="http://schemas.microsoft.com/office/mac/drawingml/2011/main" xmlns:a14="http://schemas.microsoft.com/office/drawing/2010/main" xmlns:m="http://schemas.openxmlformats.org/officeDocument/2006/math" xmlns="" val="1"/>
             </a:ext>
           </a:extLst>
         </p:spPr>
@@ -6169,7 +6169,7 @@
           </a:ln>
           <a:extLst>
             <a:ext uri="{C572A759-6A51-4108-AA02-DFA0A04FC94B}">
-              <ma14:wrappingTextBoxFlag xmlns:m="http://schemas.openxmlformats.org/officeDocument/2006/math" xmlns:a14="http://schemas.microsoft.com/office/drawing/2010/main" xmlns:ma14="http://schemas.microsoft.com/office/mac/drawingml/2011/main" xmlns="" val="1"/>
+              <ma14:wrappingTextBoxFlag xmlns:ma14="http://schemas.microsoft.com/office/mac/drawingml/2011/main" xmlns:a14="http://schemas.microsoft.com/office/drawing/2010/main" xmlns:m="http://schemas.openxmlformats.org/officeDocument/2006/math" xmlns="" val="1"/>
             </a:ext>
           </a:extLst>
         </p:spPr>
@@ -6210,7 +6210,7 @@
           </a:ln>
           <a:extLst>
             <a:ext uri="{C572A759-6A51-4108-AA02-DFA0A04FC94B}">
-              <ma14:wrappingTextBoxFlag xmlns:m="http://schemas.openxmlformats.org/officeDocument/2006/math" xmlns:a14="http://schemas.microsoft.com/office/drawing/2010/main" xmlns:ma14="http://schemas.microsoft.com/office/mac/drawingml/2011/main" xmlns="" val="1"/>
+              <ma14:wrappingTextBoxFlag xmlns:ma14="http://schemas.microsoft.com/office/mac/drawingml/2011/main" xmlns:a14="http://schemas.microsoft.com/office/drawing/2010/main" xmlns:m="http://schemas.openxmlformats.org/officeDocument/2006/math" xmlns="" val="1"/>
             </a:ext>
           </a:extLst>
         </p:spPr>
@@ -8546,20 +8546,13 @@
           <a:lstStyle/>
           <a:p>
             <a:r>
-              <a:rPr lang="en-US" dirty="0">
+              <a:rPr lang="en-US">
                 <a:latin typeface="Poppins Medium"/>
                 <a:cs typeface="Poppins Medium"/>
               </a:rPr>
-              <a:t>Lucas Bernal, Will Zimmer, Aryan </a:t>
+              <a:t>Lucas Bernal, Will Zimmer, Aryan Bonigala</a:t>
             </a:r>
-            <a:r>
-              <a:rPr lang="en-US" dirty="0" err="1">
-                <a:latin typeface="Poppins Medium"/>
-                <a:cs typeface="Poppins Medium"/>
-              </a:rPr>
-              <a:t>Bonigala</a:t>
-            </a:r>
-            <a:endParaRPr lang="en-US" dirty="0" err="1"/>
+            <a:endParaRPr lang="en-US"/>
           </a:p>
         </p:txBody>
       </p:sp>
@@ -14065,9 +14058,13 @@
           <a:lstStyle/>
           <a:p>
             <a:r>
-              <a:rPr lang="en-US"/>
-              <a:t>Introduction</a:t>
+              <a:rPr lang="en-US" dirty="0">
+                <a:latin typeface="Inter"/>
+                <a:cs typeface="Poppins SemiBold"/>
+              </a:rPr>
+              <a:t>Model </a:t>
             </a:r>
+            <a:endParaRPr lang="en-US" dirty="0"/>
           </a:p>
         </p:txBody>
       </p:sp>

--- a/Traders Final Project - Finished.pptx
+++ b/Traders Final Project - Finished.pptx
@@ -348,7 +348,7 @@
   <p1510:revLst>
     <p1510:client id="{03649AC3-76D5-3ED2-290D-C223553D5CAB}" v="6" dt="2025-04-30T13:12:02.527"/>
     <p1510:client id="{0B0E86BA-7640-2645-BA7B-5838925819FF}" v="1988" dt="2025-04-30T16:32:50.033"/>
-    <p1510:client id="{2A5FA87A-BF05-32B9-9780-02A5D7FE987F}" v="193" dt="2025-04-30T20:36:49.287"/>
+    <p1510:client id="{2A5FA87A-BF05-32B9-9780-02A5D7FE987F}" v="203" dt="2025-04-30T21:18:32.804"/>
     <p1510:client id="{47B53135-CE3E-22D9-18A6-E1881EC2AE38}" v="189" dt="2025-04-30T04:48:27.239"/>
     <p1510:client id="{D53F135F-7B07-91F5-0DFF-B832C391E11A}" v="17" dt="2025-04-29T21:23:24.106"/>
     <p1510:client id="{DAAD7A25-3863-4050-AFCA-BC8069ADCBC4}" v="1171" dt="2025-04-30T17:55:06.943"/>
@@ -3055,139 +3055,87 @@
           <a:bodyPr/>
           <a:lstStyle/>
           <a:p>
-            <a:pPr algn="l"/>
+            <a:pPr algn="l">
+              <a:lnSpc>
+                <a:spcPct val="100000"/>
+              </a:lnSpc>
+            </a:pPr>
             <a:r>
               <a:rPr lang="en-US"/>
-              <a:t>Historical daily price data for SPY</a:t>
+              <a:t>First is the raw data gathered from yahoo finance. Has the open, close, high, low price and trading volume </a:t>
             </a:r>
           </a:p>
           <a:p>
-            <a:pPr algn="l"/>
-            <a:r>
-              <a:rPr lang="en-US">
-                <a:solidFill>
-                  <a:srgbClr val="000000"/>
-                </a:solidFill>
-              </a:rPr>
-              <a:t>Tracks the S&amp;P 500 index, representing 500 leading U.S. companies.</a:t>
-            </a:r>
-            <a:endParaRPr lang="en-US"/>
-          </a:p>
-          <a:p>
-            <a:pPr algn="l"/>
-            <a:r>
-              <a:rPr lang="en-US">
-                <a:solidFill>
-                  <a:srgbClr val="000000"/>
-                </a:solidFill>
-              </a:rPr>
-              <a:t>Obtained via Yahoo Finance using the </a:t>
-            </a:r>
-            <a:r>
-              <a:rPr lang="en-US" err="1">
-                <a:solidFill>
-                  <a:srgbClr val="000000"/>
-                </a:solidFill>
-              </a:rPr>
-              <a:t>yfinance</a:t>
-            </a:r>
-            <a:r>
-              <a:rPr lang="en-US">
-                <a:solidFill>
-                  <a:srgbClr val="000000"/>
-                </a:solidFill>
-              </a:rPr>
-              <a:t> Python library.</a:t>
-            </a:r>
-            <a:endParaRPr lang="en-US"/>
-          </a:p>
-          <a:p>
-            <a:pPr algn="l"/>
-            <a:r>
-              <a:rPr lang="en-US">
-                <a:solidFill>
-                  <a:srgbClr val="000000"/>
-                </a:solidFill>
-              </a:rPr>
-              <a:t>Reliable and widely used for financial data analysis.</a:t>
-            </a:r>
-            <a:endParaRPr lang="en-US"/>
-          </a:p>
-          <a:p>
-            <a:pPr algn="l"/>
-            <a:r>
-              <a:rPr lang="en-US">
-                <a:solidFill>
-                  <a:srgbClr val="000000"/>
-                </a:solidFill>
-              </a:rPr>
-              <a:t>January 1, 2019, to January 1, 2024 (5 years).</a:t>
-            </a:r>
-            <a:endParaRPr lang="en-US"/>
-          </a:p>
-          <a:p>
-            <a:pPr algn="l"/>
-            <a:r>
-              <a:rPr lang="en-US">
-                <a:solidFill>
-                  <a:srgbClr val="000000"/>
-                </a:solidFill>
-              </a:rPr>
-              <a:t>Covers ~1,260 trading days, including bull and bear markets. (e.g., 2020 COVID crash, 2022 inflation spikes).</a:t>
-            </a:r>
-          </a:p>
-          <a:p>
-            <a:pPr algn="l"/>
+            <a:pPr algn="l">
+              <a:lnSpc>
+                <a:spcPct val="100000"/>
+              </a:lnSpc>
+            </a:pPr>
+            <a:br>
+              <a:rPr lang="en-US" dirty="0"/>
+            </a:br>
+            <a:endParaRPr lang="en-US" dirty="0"/>
+          </a:p>
+          <a:p>
+            <a:pPr algn="l">
+              <a:lnSpc>
+                <a:spcPct val="100000"/>
+              </a:lnSpc>
+            </a:pPr>
             <a:r>
               <a:rPr lang="en-US"/>
-              <a:t>Columns: Open, High, Low, Close, and Volume.</a:t>
+              <a:t>Cleaning the data to remove any errors and missing values. We also split our data 80/20</a:t>
             </a:r>
           </a:p>
           <a:p>
-            <a:pPr algn="l"/>
+            <a:pPr algn="l">
+              <a:lnSpc>
+                <a:spcPct val="100000"/>
+              </a:lnSpc>
+            </a:pPr>
+            <a:br>
+              <a:rPr lang="en-US" dirty="0"/>
+            </a:br>
+            <a:endParaRPr lang="en-US" dirty="0"/>
+          </a:p>
+          <a:p>
+            <a:pPr algn="l">
+              <a:lnSpc>
+                <a:spcPct val="100000"/>
+              </a:lnSpc>
+            </a:pPr>
             <a:r>
-              <a:rPr lang="en-US"/>
-              <a:t>No missing values in raw data</a:t>
+              <a:rPr lang="en-US" dirty="0"/>
+              <a:t>Next is feature engineering where we took this processed data and turned it into something the model can use. We created features to capture different ascots of market behavior</a:t>
             </a:r>
           </a:p>
           <a:p>
-            <a:pPr algn="l"/>
+            <a:pPr algn="l">
+              <a:lnSpc>
+                <a:spcPct val="100000"/>
+              </a:lnSpc>
+            </a:pPr>
+            <a:br>
+              <a:rPr lang="en-US" dirty="0"/>
+            </a:br>
+            <a:endParaRPr lang="en-US" dirty="0"/>
+          </a:p>
+          <a:p>
+            <a:pPr algn="l">
+              <a:lnSpc>
+                <a:spcPct val="100000"/>
+              </a:lnSpc>
+            </a:pPr>
             <a:r>
-              <a:rPr lang="en-US"/>
-              <a:t>Consistent daily records</a:t>
+              <a:rPr lang="en-US" dirty="0"/>
+              <a:t>Then we move on to model training. Give the data to the Random Forest Classifier which learned to classify periods as high or low volatility based on the threshold we set</a:t>
             </a:r>
           </a:p>
           <a:p>
-            <a:pPr algn="l"/>
-            <a:r>
-              <a:rPr lang="en-US"/>
-              <a:t>Captures major events: 2020 COVID market crash, 2022 inflation-driven volatility.</a:t>
-            </a:r>
-          </a:p>
-          <a:p>
-            <a:pPr algn="l"/>
-            <a:r>
-              <a:rPr lang="en-US"/>
-              <a:t>SPY’s high liquidity makes it ideal for studying market trends.</a:t>
-            </a:r>
-          </a:p>
-          <a:p>
-            <a:pPr algn="l"/>
-            <a:r>
-              <a:rPr lang="en-US"/>
-              <a:t>Sufficient for training machine learning models.</a:t>
-            </a:r>
-          </a:p>
-          <a:p>
-            <a:pPr algn="l"/>
-            <a:endParaRPr lang="en-US"/>
-          </a:p>
-          <a:p>
-            <a:endParaRPr lang="en-US">
-              <a:solidFill>
-                <a:srgbClr val="000000"/>
-              </a:solidFill>
-              <a:latin typeface="Helvetica Neue"/>
+            <a:endParaRPr lang="en-US" dirty="0">
+              <a:latin typeface="Calibri"/>
+              <a:ea typeface="Calibri"/>
+              <a:cs typeface="Calibri"/>
             </a:endParaRPr>
           </a:p>
         </p:txBody>
@@ -3195,7 +3143,7 @@
     </p:spTree>
     <p:extLst>
       <p:ext uri="{BB962C8B-B14F-4D97-AF65-F5344CB8AC3E}">
-        <p14:creationId xmlns:p14="http://schemas.microsoft.com/office/powerpoint/2010/main" val="735300837"/>
+        <p14:creationId xmlns:p14="http://schemas.microsoft.com/office/powerpoint/2010/main" val="1009821291"/>
       </p:ext>
     </p:extLst>
   </p:cSld>
@@ -3254,218 +3202,86 @@
           <a:bodyPr/>
           <a:lstStyle/>
           <a:p>
-            <a:pPr marL="342900" indent="-342900" algn="l">
-              <a:buFont typeface="Arial"/>
-              <a:buChar char="•"/>
-              <a:defRPr/>
-            </a:pPr>
+            <a:pPr algn="l"/>
             <a:r>
-              <a:rPr lang="en-US" b="1"/>
-              <a:t>Returns</a:t>
+              <a:rPr lang="en-US" dirty="0">
+                <a:solidFill>
+                  <a:srgbClr val="000000"/>
+                </a:solidFill>
+              </a:rPr>
+              <a:t>This is a sample of our </a:t>
             </a:r>
             <a:r>
-              <a:rPr lang="en-US"/>
-              <a:t>:</a:t>
-            </a:r>
-          </a:p>
-          <a:p>
-            <a:pPr marL="342900" lvl="1" indent="-342900" algn="l">
-              <a:buFont typeface="Arial"/>
-              <a:buChar char="•"/>
-              <a:defRPr/>
-            </a:pPr>
-            <a:r>
-              <a:rPr lang="en-US"/>
-              <a:t>Daily percentage change in SPY Close price (spy['Close'].</a:t>
+              <a:rPr lang="en-US" dirty="0" err="1">
+                <a:solidFill>
+                  <a:srgbClr val="000000"/>
+                </a:solidFill>
+              </a:rPr>
+              <a:t>rawdataset</a:t>
             </a:r>
             <a:r>
-              <a:rPr lang="en-US" err="1"/>
-              <a:t>pct_change</a:t>
+              <a:rPr lang="en-US" dirty="0">
+                <a:solidFill>
+                  <a:srgbClr val="000000"/>
+                </a:solidFill>
+              </a:rPr>
+              <a:t> from June   2023. It includes the open, close, high, low and volume for the SPY. </a:t>
             </a:r>
+            <a:endParaRPr lang="en-US"/>
+          </a:p>
+          <a:p>
+            <a:pPr algn="l"/>
+            <a:br>
+              <a:rPr lang="en-US" dirty="0"/>
+            </a:br>
+            <a:endParaRPr lang="en-US" dirty="0"/>
+          </a:p>
+          <a:p>
+            <a:pPr algn="l"/>
             <a:r>
-              <a:rPr lang="en-US"/>
-              <a:t>()).</a:t>
+              <a:rPr lang="en-US" dirty="0">
+                <a:solidFill>
+                  <a:srgbClr val="000000"/>
+                </a:solidFill>
+              </a:rPr>
+              <a:t>Our total data covers 5 year from Jan 1st 2019 to Jan 1st 2024 </a:t>
             </a:r>
-          </a:p>
-          <a:p>
-            <a:pPr marL="342900" lvl="1" indent="-342900" algn="l">
-              <a:buFont typeface="Arial"/>
-              <a:buChar char="•"/>
-              <a:defRPr/>
-            </a:pPr>
+            <a:endParaRPr lang="en-US" dirty="0"/>
+          </a:p>
+          <a:p>
+            <a:pPr algn="l"/>
+            <a:br>
+              <a:rPr lang="en-US" dirty="0"/>
+            </a:br>
+            <a:endParaRPr lang="en-US" dirty="0"/>
+          </a:p>
+          <a:p>
+            <a:pPr algn="l"/>
             <a:r>
-              <a:rPr lang="en-US"/>
-              <a:t>Captures daily price movements.</a:t>
+              <a:rPr lang="en-US" dirty="0">
+                <a:solidFill>
+                  <a:srgbClr val="000000"/>
+                </a:solidFill>
+              </a:rPr>
+              <a:t>Before we use this dataset we have to clean it up so that it’s ready for the next step feature engineering. </a:t>
             </a:r>
-          </a:p>
-          <a:p>
-            <a:pPr lvl="1" indent="0" algn="l">
-              <a:defRPr/>
-            </a:pPr>
-            <a:r>
-              <a:rPr lang="en-US" b="1"/>
-              <a:t>Rolling Volatility</a:t>
-            </a:r>
-            <a:r>
-              <a:rPr lang="en-US"/>
-              <a:t>:</a:t>
-            </a:r>
-          </a:p>
-          <a:p>
-            <a:pPr marL="342900" indent="-342900" algn="l">
-              <a:buFont typeface="Arial"/>
-              <a:buChar char="•"/>
-              <a:defRPr/>
-            </a:pPr>
-            <a:r>
-              <a:rPr lang="en-US"/>
-              <a:t>14-day standard deviation of returns (spy['Return'].rolling(window=14).std()).</a:t>
-            </a:r>
-          </a:p>
-          <a:p>
-            <a:pPr marL="342900" indent="-342900" algn="l">
-              <a:buFont typeface="Arial"/>
-              <a:buChar char="•"/>
-              <a:defRPr/>
-            </a:pPr>
-            <a:r>
-              <a:rPr lang="en-US"/>
-              <a:t>Measures price swing intensity.</a:t>
-            </a:r>
-          </a:p>
-          <a:p>
-            <a:pPr algn="l">
-              <a:defRPr/>
-            </a:pPr>
-            <a:r>
-              <a:rPr lang="en-US" b="1"/>
-              <a:t>Average True Range (ATR)</a:t>
-            </a:r>
-            <a:r>
-              <a:rPr lang="en-US"/>
-              <a:t>:</a:t>
-            </a:r>
-          </a:p>
-          <a:p>
-            <a:pPr marL="342900" indent="-342900" algn="l">
-              <a:buFont typeface="Arial"/>
-              <a:buChar char="•"/>
-              <a:defRPr/>
-            </a:pPr>
-            <a:r>
-              <a:rPr lang="en-US"/>
-              <a:t>14-day mean of High-Low range (spy['High-Low'].rolling(window=14).mean()).</a:t>
-            </a:r>
-          </a:p>
-          <a:p>
-            <a:pPr marL="342900" indent="-342900" algn="l">
-              <a:buFont typeface="Arial"/>
-              <a:buChar char="•"/>
-              <a:defRPr/>
-            </a:pPr>
-            <a:r>
-              <a:rPr lang="en-US"/>
-              <a:t>Simplified indicator of daily volatility.</a:t>
-            </a:r>
-          </a:p>
-          <a:p>
-            <a:pPr algn="l">
-              <a:defRPr/>
-            </a:pPr>
-            <a:r>
-              <a:rPr lang="en-US" b="1"/>
-              <a:t>Skewness &amp; Kurtosis</a:t>
-            </a:r>
-            <a:r>
-              <a:rPr lang="en-US"/>
-              <a:t>:</a:t>
-            </a:r>
-          </a:p>
-          <a:p>
-            <a:pPr marL="342900" indent="-342900" algn="l">
-              <a:buFont typeface="Arial"/>
-              <a:buChar char="•"/>
-              <a:defRPr/>
-            </a:pPr>
-            <a:r>
-              <a:rPr lang="en-US"/>
-              <a:t>14-day rolling skew and kurtosis of returns (spy['Return'].rolling(window=14).apply(skew/kurtosis)).</a:t>
-            </a:r>
-          </a:p>
-          <a:p>
-            <a:pPr marL="342900" indent="-342900" algn="l">
-              <a:buFont typeface="Arial"/>
-              <a:buChar char="•"/>
-              <a:defRPr/>
-            </a:pPr>
-            <a:r>
-              <a:rPr lang="en-US"/>
-              <a:t>Assesses distribution shape of returns.</a:t>
-            </a:r>
-          </a:p>
-          <a:p>
-            <a:pPr algn="l">
-              <a:defRPr/>
-            </a:pPr>
-            <a:r>
-              <a:rPr lang="en-US" b="1"/>
-              <a:t>Average Volume</a:t>
-            </a:r>
-            <a:r>
-              <a:rPr lang="en-US"/>
-              <a:t>:</a:t>
-            </a:r>
-          </a:p>
-          <a:p>
-            <a:pPr marL="342900" indent="-342900" algn="l">
-              <a:buFont typeface="Arial"/>
-              <a:buChar char="•"/>
-              <a:defRPr/>
-            </a:pPr>
-            <a:r>
-              <a:rPr lang="en-US"/>
-              <a:t>14-day mean trading volume (spy['Volume'].rolling(window=14).mean()).</a:t>
-            </a:r>
-          </a:p>
-          <a:p>
-            <a:pPr marL="342900" indent="-342900" algn="l">
-              <a:buFont typeface="Arial"/>
-              <a:buChar char="•"/>
-              <a:defRPr/>
-            </a:pPr>
-            <a:r>
-              <a:rPr lang="en-US"/>
-              <a:t>Reflects market participation.</a:t>
-            </a:r>
-          </a:p>
-          <a:p>
-            <a:pPr indent="0" algn="l">
-              <a:defRPr/>
-            </a:pPr>
-            <a:endParaRPr lang="en-US"/>
-          </a:p>
-          <a:p>
-            <a:pPr lvl="1" indent="0" algn="l"/>
-            <a:endParaRPr lang="en-US"/>
-          </a:p>
-          <a:p>
-            <a:pPr lvl="1" algn="l"/>
-            <a:endParaRPr lang="en-US"/>
+            <a:endParaRPr lang="en-US" dirty="0"/>
           </a:p>
           <a:p>
             <a:pPr algn="l"/>
-            <a:endParaRPr lang="en-US"/>
-          </a:p>
-          <a:p>
-            <a:pPr algn="l"/>
-            <a:endParaRPr lang="en-US"/>
+            <a:endParaRPr lang="en-US" dirty="0">
+              <a:solidFill>
+                <a:srgbClr val="000000"/>
+              </a:solidFill>
+              <a:latin typeface="Helvetica Neue"/>
+            </a:endParaRPr>
           </a:p>
         </p:txBody>
       </p:sp>
     </p:spTree>
     <p:extLst>
       <p:ext uri="{BB962C8B-B14F-4D97-AF65-F5344CB8AC3E}">
-        <p14:creationId xmlns:p14="http://schemas.microsoft.com/office/powerpoint/2010/main" val="3425986996"/>
+        <p14:creationId xmlns:p14="http://schemas.microsoft.com/office/powerpoint/2010/main" val="735300837"/>
       </p:ext>
     </p:extLst>
   </p:cSld>
@@ -3525,36 +3341,126 @@
           <a:lstStyle/>
           <a:p>
             <a:pPr algn="l">
-              <a:lnSpc>
-                <a:spcPct val="100000"/>
-              </a:lnSpc>
+              <a:defRPr/>
             </a:pPr>
-            <a:endParaRPr lang="en-US"/>
+            <a:r>
+              <a:rPr lang="en-US" dirty="0"/>
+              <a:t>Calculated returns which is just the percentage change in the closing price from one day to the next. </a:t>
+            </a:r>
+            <a:br>
+              <a:rPr lang="en-US" dirty="0">
+                <a:cs typeface="+mn-lt"/>
+              </a:rPr>
+            </a:br>
+            <a:endParaRPr lang="en-US">
+              <a:cs typeface="+mn-lt"/>
+            </a:endParaRPr>
+          </a:p>
+          <a:p>
+            <a:pPr algn="l">
+              <a:defRPr/>
+            </a:pPr>
+            <a:r>
+              <a:rPr lang="en-US" dirty="0"/>
+              <a:t>Rolling Volatility. A 14 day window and calculated the standard deviation of return which shows how much prices were swinging over that period </a:t>
+            </a:r>
+            <a:br>
+              <a:rPr lang="en-US" dirty="0">
+                <a:cs typeface="+mn-lt"/>
+              </a:rPr>
+            </a:br>
+            <a:endParaRPr lang="en-US">
+              <a:cs typeface="+mn-lt"/>
+            </a:endParaRPr>
+          </a:p>
+          <a:p>
+            <a:pPr algn="l">
+              <a:defRPr/>
+            </a:pPr>
+            <a:r>
+              <a:rPr lang="en-US" dirty="0"/>
+              <a:t>ART. Difference between the high and low price over 14 days. Gives us a sense of the typical price range </a:t>
+            </a:r>
+            <a:br>
+              <a:rPr lang="en-US" dirty="0">
+                <a:cs typeface="+mn-lt"/>
+              </a:rPr>
+            </a:br>
+            <a:endParaRPr lang="en-US">
+              <a:cs typeface="+mn-lt"/>
+            </a:endParaRPr>
+          </a:p>
+          <a:p>
+            <a:pPr algn="l">
+              <a:defRPr/>
+            </a:pPr>
+            <a:r>
+              <a:rPr lang="en-US" dirty="0"/>
+              <a:t>Skewness. Skewness tells us if returns are leaning more positive or negative</a:t>
+            </a:r>
+            <a:br>
+              <a:rPr lang="en-US" dirty="0">
+                <a:cs typeface="+mn-lt"/>
+              </a:rPr>
+            </a:br>
+            <a:endParaRPr lang="en-US">
+              <a:cs typeface="+mn-lt"/>
+            </a:endParaRPr>
+          </a:p>
+          <a:p>
+            <a:pPr algn="l">
+              <a:defRPr/>
+            </a:pPr>
+            <a:r>
+              <a:rPr lang="en-US" dirty="0"/>
+              <a:t>Kurtosis shows if there are extreme price moves like big spikes </a:t>
+            </a:r>
+            <a:br>
+              <a:rPr lang="en-US" dirty="0">
+                <a:cs typeface="+mn-lt"/>
+              </a:rPr>
+            </a:br>
+            <a:endParaRPr lang="en-US">
+              <a:cs typeface="+mn-lt"/>
+            </a:endParaRPr>
+          </a:p>
+          <a:p>
+            <a:pPr algn="l">
+              <a:defRPr/>
+            </a:pPr>
+            <a:r>
+              <a:rPr lang="en-US" dirty="0"/>
+              <a:t>Rolling average volume. Average trading volume over 14 days. Reflects the how active the market was. </a:t>
+            </a:r>
+            <a:br>
+              <a:rPr lang="en-US" dirty="0">
+                <a:cs typeface="+mn-lt"/>
+              </a:rPr>
+            </a:br>
+            <a:endParaRPr lang="en-US">
+              <a:cs typeface="+mn-lt"/>
+            </a:endParaRPr>
           </a:p>
           <a:p>
             <a:pPr algn="l"/>
             <a:r>
               <a:rPr lang="en-US"/>
-              <a:t>Defined market regimes: High Volatility (1) if next week’s rolling volatility exceeds historical median; Low Volatility (0) otherwise.</a:t>
+              <a:t>Bollinger Bands. 14 day simple moving average and two standard deviation to form upper and lower bands. Help to spot when prices are unusually high or low </a:t>
             </a:r>
           </a:p>
           <a:p>
-            <a:pPr algn="l"/>
-            <a:endParaRPr lang="en-US"/>
-          </a:p>
-          <a:p>
-            <a:endParaRPr lang="en-US">
-              <a:latin typeface="Calibri"/>
-              <a:ea typeface="Calibri"/>
-              <a:cs typeface="Calibri"/>
-            </a:endParaRPr>
+            <a:pPr marL="342900" indent="-342900" algn="l">
+              <a:buFont typeface="Arial"/>
+              <a:buChar char="•"/>
+            </a:pPr>
+            <a:endParaRPr lang="en-US" dirty="0"/>
           </a:p>
         </p:txBody>
       </p:sp>
     </p:spTree>
     <p:extLst>
       <p:ext uri="{BB962C8B-B14F-4D97-AF65-F5344CB8AC3E}">
-        <p14:creationId xmlns:p14="http://schemas.microsoft.com/office/powerpoint/2010/main" val="2669110143"/>
+        <p14:creationId xmlns:p14="http://schemas.microsoft.com/office/powerpoint/2010/main" val="3425986996"/>
       </p:ext>
     </p:extLst>
   </p:cSld>
@@ -3613,6 +3519,467 @@
           <a:bodyPr/>
           <a:lstStyle/>
           <a:p>
+            <a:pPr algn="l">
+              <a:lnSpc>
+                <a:spcPct val="100000"/>
+              </a:lnSpc>
+            </a:pPr>
+            <a:endParaRPr lang="en-US"/>
+          </a:p>
+          <a:p>
+            <a:pPr algn="l"/>
+            <a:r>
+              <a:rPr lang="en-US"/>
+              <a:t>Data after feature engineering.</a:t>
+            </a:r>
+          </a:p>
+          <a:p>
+            <a:pPr algn="l"/>
+            <a:br>
+              <a:rPr lang="en-US" dirty="0"/>
+            </a:br>
+            <a:r>
+              <a:rPr lang="en-US"/>
+              <a:t>It gives use the rolling volatility, ATR, Skewness, kurtosis, and Average volume </a:t>
+            </a:r>
+          </a:p>
+          <a:p>
+            <a:pPr algn="l"/>
+            <a:br>
+              <a:rPr lang="en-US" dirty="0">
+                <a:cs typeface="+mn-lt"/>
+              </a:rPr>
+            </a:br>
+            <a:r>
+              <a:rPr lang="en-US" dirty="0"/>
+              <a:t>By combining all of these price based features, statistical measure and volume data we made sure the model had everything it needed to predict volatility accurately</a:t>
+            </a:r>
+          </a:p>
+          <a:p>
+            <a:pPr algn="l"/>
+            <a:endParaRPr lang="en-US" dirty="0"/>
+          </a:p>
+          <a:p>
+            <a:pPr algn="l"/>
+            <a:r>
+              <a:rPr lang="en-US" dirty="0"/>
+              <a:t>Defined market regimes: High Volatility (1) if next week’s rolling volatility exceeds historical median; Low Volatility (0) otherwise.</a:t>
+            </a:r>
+          </a:p>
+          <a:p>
+            <a:pPr algn="l"/>
+            <a:endParaRPr lang="en-US"/>
+          </a:p>
+          <a:p>
+            <a:endParaRPr lang="en-US" dirty="0">
+              <a:latin typeface="Calibri"/>
+              <a:ea typeface="Calibri"/>
+              <a:cs typeface="Calibri"/>
+            </a:endParaRPr>
+          </a:p>
+        </p:txBody>
+      </p:sp>
+    </p:spTree>
+    <p:extLst>
+      <p:ext uri="{BB962C8B-B14F-4D97-AF65-F5344CB8AC3E}">
+        <p14:creationId xmlns:p14="http://schemas.microsoft.com/office/powerpoint/2010/main" val="2669110143"/>
+      </p:ext>
+    </p:extLst>
+  </p:cSld>
+  <p:clrMapOvr>
+    <a:masterClrMapping/>
+  </p:clrMapOvr>
+</p:notes>
+</file>
+
+<file path=ppt/notesSlides/notesSlide5.xml><?xml version="1.0" encoding="utf-8"?>
+<p:notes xmlns:a="http://schemas.openxmlformats.org/drawingml/2006/main" xmlns:r="http://schemas.openxmlformats.org/officeDocument/2006/relationships" xmlns:p="http://schemas.openxmlformats.org/presentationml/2006/main">
+  <p:cSld>
+    <p:spTree>
+      <p:nvGrpSpPr>
+        <p:cNvPr id="1" name=""/>
+        <p:cNvGrpSpPr/>
+        <p:nvPr/>
+      </p:nvGrpSpPr>
+      <p:grpSpPr>
+        <a:xfrm>
+          <a:off x="0" y="0"/>
+          <a:ext cx="0" cy="0"/>
+          <a:chOff x="0" y="0"/>
+          <a:chExt cx="0" cy="0"/>
+        </a:xfrm>
+      </p:grpSpPr>
+      <p:sp>
+        <p:nvSpPr>
+          <p:cNvPr id="2" name="Slide Image Placeholder 1"/>
+          <p:cNvSpPr>
+            <a:spLocks noGrp="1" noRot="1" noChangeAspect="1"/>
+          </p:cNvSpPr>
+          <p:nvPr>
+            <p:ph type="sldImg"/>
+          </p:nvPr>
+        </p:nvSpPr>
+        <p:spPr>
+          <a:xfrm>
+            <a:off x="381000" y="685800"/>
+            <a:ext cx="6096000" cy="3429000"/>
+          </a:xfrm>
+        </p:spPr>
+      </p:sp>
+      <p:sp>
+        <p:nvSpPr>
+          <p:cNvPr id="3" name="Notes Placeholder 2"/>
+          <p:cNvSpPr>
+            <a:spLocks noGrp="1"/>
+          </p:cNvSpPr>
+          <p:nvPr>
+            <p:ph type="body" idx="1"/>
+          </p:nvPr>
+        </p:nvSpPr>
+        <p:spPr/>
+        <p:txBody>
+          <a:bodyPr/>
+          <a:lstStyle/>
+          <a:p>
+            <a:pPr algn="l">
+              <a:lnSpc>
+                <a:spcPct val="100000"/>
+              </a:lnSpc>
+            </a:pPr>
+            <a:r>
+              <a:rPr lang="en-US"/>
+              <a:t>These are graphs of all the features that we used over a 5 year time period. </a:t>
+            </a:r>
+          </a:p>
+          <a:p>
+            <a:pPr algn="l">
+              <a:lnSpc>
+                <a:spcPct val="100000"/>
+              </a:lnSpc>
+            </a:pPr>
+            <a:br>
+              <a:rPr lang="en-US" dirty="0"/>
+            </a:br>
+            <a:endParaRPr lang="en-US" dirty="0"/>
+          </a:p>
+          <a:p>
+            <a:pPr algn="l">
+              <a:lnSpc>
+                <a:spcPct val="100000"/>
+              </a:lnSpc>
+            </a:pPr>
+            <a:r>
+              <a:rPr lang="en-US"/>
+              <a:t>This graph help confirm that our features made sense and were ready for modeling</a:t>
+            </a:r>
+          </a:p>
+          <a:p>
+            <a:endParaRPr lang="en-US" dirty="0">
+              <a:latin typeface="Calibri"/>
+              <a:ea typeface="Calibri"/>
+              <a:cs typeface="Calibri"/>
+            </a:endParaRPr>
+          </a:p>
+        </p:txBody>
+      </p:sp>
+    </p:spTree>
+    <p:extLst>
+      <p:ext uri="{BB962C8B-B14F-4D97-AF65-F5344CB8AC3E}">
+        <p14:creationId xmlns:p14="http://schemas.microsoft.com/office/powerpoint/2010/main" val="2556265732"/>
+      </p:ext>
+    </p:extLst>
+  </p:cSld>
+  <p:clrMapOvr>
+    <a:masterClrMapping/>
+  </p:clrMapOvr>
+</p:notes>
+</file>
+
+<file path=ppt/notesSlides/notesSlide6.xml><?xml version="1.0" encoding="utf-8"?>
+<p:notes xmlns:a="http://schemas.openxmlformats.org/drawingml/2006/main" xmlns:r="http://schemas.openxmlformats.org/officeDocument/2006/relationships" xmlns:p="http://schemas.openxmlformats.org/presentationml/2006/main">
+  <p:cSld>
+    <p:spTree>
+      <p:nvGrpSpPr>
+        <p:cNvPr id="1" name=""/>
+        <p:cNvGrpSpPr/>
+        <p:nvPr/>
+      </p:nvGrpSpPr>
+      <p:grpSpPr>
+        <a:xfrm>
+          <a:off x="0" y="0"/>
+          <a:ext cx="0" cy="0"/>
+          <a:chOff x="0" y="0"/>
+          <a:chExt cx="0" cy="0"/>
+        </a:xfrm>
+      </p:grpSpPr>
+      <p:sp>
+        <p:nvSpPr>
+          <p:cNvPr id="2" name="Slide Image Placeholder 1"/>
+          <p:cNvSpPr>
+            <a:spLocks noGrp="1" noRot="1" noChangeAspect="1"/>
+          </p:cNvSpPr>
+          <p:nvPr>
+            <p:ph type="sldImg"/>
+          </p:nvPr>
+        </p:nvSpPr>
+        <p:spPr>
+          <a:xfrm>
+            <a:off x="381000" y="685800"/>
+            <a:ext cx="6096000" cy="3429000"/>
+          </a:xfrm>
+        </p:spPr>
+      </p:sp>
+      <p:sp>
+        <p:nvSpPr>
+          <p:cNvPr id="3" name="Notes Placeholder 2"/>
+          <p:cNvSpPr>
+            <a:spLocks noGrp="1"/>
+          </p:cNvSpPr>
+          <p:nvPr>
+            <p:ph type="body" idx="1"/>
+          </p:nvPr>
+        </p:nvSpPr>
+        <p:spPr/>
+        <p:txBody>
+          <a:bodyPr/>
+          <a:lstStyle/>
+          <a:p>
+            <a:pPr algn="l">
+              <a:lnSpc>
+                <a:spcPct val="100000"/>
+              </a:lnSpc>
+            </a:pPr>
+            <a:r>
+              <a:rPr lang="en-US" dirty="0"/>
+              <a:t>Feature correlation matrix shows how our engineered feature relate to each other </a:t>
+            </a:r>
+          </a:p>
+          <a:p>
+            <a:pPr algn="l">
+              <a:lnSpc>
+                <a:spcPct val="100000"/>
+              </a:lnSpc>
+            </a:pPr>
+            <a:br>
+              <a:rPr lang="en-US" dirty="0"/>
+            </a:br>
+            <a:endParaRPr lang="en-US" dirty="0"/>
+          </a:p>
+          <a:p>
+            <a:pPr algn="l">
+              <a:lnSpc>
+                <a:spcPct val="100000"/>
+              </a:lnSpc>
+            </a:pPr>
+            <a:r>
+              <a:rPr lang="en-US" dirty="0"/>
+              <a:t>-1 for strong negative relationship to 1 for a strong positive one</a:t>
+            </a:r>
+          </a:p>
+          <a:p>
+            <a:pPr algn="l">
+              <a:lnSpc>
+                <a:spcPct val="100000"/>
+              </a:lnSpc>
+            </a:pPr>
+            <a:br>
+              <a:rPr lang="en-US" dirty="0"/>
+            </a:br>
+            <a:endParaRPr lang="en-US" dirty="0"/>
+          </a:p>
+          <a:p>
+            <a:pPr algn="l">
+              <a:lnSpc>
+                <a:spcPct val="100000"/>
+              </a:lnSpc>
+            </a:pPr>
+            <a:r>
+              <a:rPr lang="en-US" b="1" dirty="0"/>
+              <a:t>Rolling Volatility and ATR</a:t>
+            </a:r>
+            <a:r>
+              <a:rPr lang="en-US" dirty="0"/>
+              <a:t> have a moderate positive correlation, around 0.054. This makes sense because both measure how much prices are moving.</a:t>
+            </a:r>
+          </a:p>
+          <a:p>
+            <a:pPr algn="l">
+              <a:lnSpc>
+                <a:spcPct val="100000"/>
+              </a:lnSpc>
+            </a:pPr>
+            <a:br>
+              <a:rPr lang="en-US" dirty="0"/>
+            </a:br>
+            <a:endParaRPr lang="en-US" dirty="0"/>
+          </a:p>
+          <a:p>
+            <a:pPr algn="l">
+              <a:lnSpc>
+                <a:spcPct val="100000"/>
+              </a:lnSpc>
+            </a:pPr>
+            <a:r>
+              <a:rPr lang="en-US" b="1" dirty="0"/>
+              <a:t>Returns and Bollinger Band Width</a:t>
+            </a:r>
+            <a:r>
+              <a:rPr lang="en-US" dirty="0"/>
+              <a:t> show a slight negative correlation, about -0.045. This suggests that when prices swing a lot, the bands tend to widen, which is what we’d expect.</a:t>
+            </a:r>
+          </a:p>
+          <a:p>
+            <a:pPr algn="l">
+              <a:lnSpc>
+                <a:spcPct val="100000"/>
+              </a:lnSpc>
+            </a:pPr>
+            <a:br>
+              <a:rPr lang="en-US" dirty="0"/>
+            </a:br>
+            <a:endParaRPr lang="en-US" dirty="0"/>
+          </a:p>
+          <a:p>
+            <a:pPr algn="l">
+              <a:lnSpc>
+                <a:spcPct val="100000"/>
+              </a:lnSpc>
+            </a:pPr>
+            <a:r>
+              <a:rPr lang="en-US" b="1" dirty="0"/>
+              <a:t>Skewness and Volume</a:t>
+            </a:r>
+            <a:r>
+              <a:rPr lang="en-US" dirty="0"/>
+              <a:t> have a very low correlation, around -0.01, which is great—it means they’re providing unique information to the model.</a:t>
+            </a:r>
+          </a:p>
+          <a:p>
+            <a:pPr algn="l">
+              <a:lnSpc>
+                <a:spcPct val="100000"/>
+              </a:lnSpc>
+            </a:pPr>
+            <a:br>
+              <a:rPr lang="en-US" dirty="0"/>
+            </a:br>
+            <a:endParaRPr lang="en-US" dirty="0"/>
+          </a:p>
+          <a:p>
+            <a:pPr algn="l">
+              <a:lnSpc>
+                <a:spcPct val="100000"/>
+              </a:lnSpc>
+            </a:pPr>
+            <a:r>
+              <a:rPr lang="en-US" dirty="0"/>
+              <a:t>The lower the correlation with each other told use our feature engineering was on the right track creating a divers set of inputs</a:t>
+            </a:r>
+          </a:p>
+          <a:p>
+            <a:pPr algn="l">
+              <a:lnSpc>
+                <a:spcPct val="100000"/>
+              </a:lnSpc>
+            </a:pPr>
+            <a:br>
+              <a:rPr lang="en-US" dirty="0"/>
+            </a:br>
+            <a:endParaRPr lang="en-US" dirty="0"/>
+          </a:p>
+          <a:p>
+            <a:pPr algn="l">
+              <a:lnSpc>
+                <a:spcPct val="100000"/>
+              </a:lnSpc>
+            </a:pPr>
+            <a:r>
+              <a:rPr lang="en-US" dirty="0"/>
+              <a:t>Now I will hand it over to Lucas to show you how this is important in getting our data ready for model training </a:t>
+            </a:r>
+          </a:p>
+          <a:p>
+            <a:pPr algn="l">
+              <a:lnSpc>
+                <a:spcPct val="100000"/>
+              </a:lnSpc>
+            </a:pPr>
+            <a:br>
+              <a:rPr lang="en-US" dirty="0"/>
+            </a:br>
+            <a:endParaRPr lang="en-US" dirty="0"/>
+          </a:p>
+          <a:p>
+            <a:endParaRPr lang="en-US" dirty="0">
+              <a:latin typeface="Calibri"/>
+              <a:ea typeface="Calibri"/>
+              <a:cs typeface="Calibri"/>
+            </a:endParaRPr>
+          </a:p>
+        </p:txBody>
+      </p:sp>
+    </p:spTree>
+    <p:extLst>
+      <p:ext uri="{BB962C8B-B14F-4D97-AF65-F5344CB8AC3E}">
+        <p14:creationId xmlns:p14="http://schemas.microsoft.com/office/powerpoint/2010/main" val="4045493672"/>
+      </p:ext>
+    </p:extLst>
+  </p:cSld>
+  <p:clrMapOvr>
+    <a:masterClrMapping/>
+  </p:clrMapOvr>
+</p:notes>
+</file>
+
+<file path=ppt/notesSlides/notesSlide7.xml><?xml version="1.0" encoding="utf-8"?>
+<p:notes xmlns:a="http://schemas.openxmlformats.org/drawingml/2006/main" xmlns:r="http://schemas.openxmlformats.org/officeDocument/2006/relationships" xmlns:p="http://schemas.openxmlformats.org/presentationml/2006/main">
+  <p:cSld>
+    <p:spTree>
+      <p:nvGrpSpPr>
+        <p:cNvPr id="1" name=""/>
+        <p:cNvGrpSpPr/>
+        <p:nvPr/>
+      </p:nvGrpSpPr>
+      <p:grpSpPr>
+        <a:xfrm>
+          <a:off x="0" y="0"/>
+          <a:ext cx="0" cy="0"/>
+          <a:chOff x="0" y="0"/>
+          <a:chExt cx="0" cy="0"/>
+        </a:xfrm>
+      </p:grpSpPr>
+      <p:sp>
+        <p:nvSpPr>
+          <p:cNvPr id="2" name="Slide Image Placeholder 1"/>
+          <p:cNvSpPr>
+            <a:spLocks noGrp="1" noRot="1" noChangeAspect="1"/>
+          </p:cNvSpPr>
+          <p:nvPr>
+            <p:ph type="sldImg"/>
+          </p:nvPr>
+        </p:nvSpPr>
+        <p:spPr>
+          <a:xfrm>
+            <a:off x="381000" y="685800"/>
+            <a:ext cx="6096000" cy="3429000"/>
+          </a:xfrm>
+        </p:spPr>
+      </p:sp>
+      <p:sp>
+        <p:nvSpPr>
+          <p:cNvPr id="3" name="Notes Placeholder 2"/>
+          <p:cNvSpPr>
+            <a:spLocks noGrp="1"/>
+          </p:cNvSpPr>
+          <p:nvPr>
+            <p:ph type="body" idx="1"/>
+          </p:nvPr>
+        </p:nvSpPr>
+        <p:spPr/>
+        <p:txBody>
+          <a:bodyPr/>
+          <a:lstStyle/>
+          <a:p>
             <a:r>
               <a:rPr lang="en-US"/>
               <a:t>OOB Score = Out of bag score, uses samples not used in the model training to try and make the model unbiased. If its much lower than the other accuracy, overfitting.</a:t>
@@ -3633,7 +4000,7 @@
 </p:notes>
 </file>
 
-<file path=ppt/notesSlides/notesSlide5.xml><?xml version="1.0" encoding="utf-8"?>
+<file path=ppt/notesSlides/notesSlide8.xml><?xml version="1.0" encoding="utf-8"?>
 <p:notes xmlns:a="http://schemas.openxmlformats.org/drawingml/2006/main" xmlns:r="http://schemas.openxmlformats.org/officeDocument/2006/relationships" xmlns:p="http://schemas.openxmlformats.org/presentationml/2006/main">
   <p:cSld>
     <p:spTree>
@@ -5592,7 +5959,7 @@
           </a:ln>
           <a:extLst>
             <a:ext uri="{C572A759-6A51-4108-AA02-DFA0A04FC94B}">
-              <ma14:wrappingTextBoxFlag xmlns:lc="http://schemas.openxmlformats.org/drawingml/2006/lockedCanvas" xmlns:ma14="http://schemas.microsoft.com/office/mac/drawingml/2011/main" xmlns:a14="http://schemas.microsoft.com/office/drawing/2010/main" xmlns:m="http://schemas.openxmlformats.org/officeDocument/2006/math" xmlns="" val="1"/>
+              <ma14:wrappingTextBoxFlag xmlns:m="http://schemas.openxmlformats.org/officeDocument/2006/math" xmlns:a14="http://schemas.microsoft.com/office/drawing/2010/main" xmlns:ma14="http://schemas.microsoft.com/office/mac/drawingml/2011/main" xmlns:lc="http://schemas.openxmlformats.org/drawingml/2006/lockedCanvas" xmlns="" val="1"/>
             </a:ext>
           </a:extLst>
         </p:spPr>
@@ -6169,7 +6536,7 @@
           </a:ln>
           <a:extLst>
             <a:ext uri="{C572A759-6A51-4108-AA02-DFA0A04FC94B}">
-              <ma14:wrappingTextBoxFlag xmlns:ma14="http://schemas.microsoft.com/office/mac/drawingml/2011/main" xmlns:a14="http://schemas.microsoft.com/office/drawing/2010/main" xmlns:m="http://schemas.openxmlformats.org/officeDocument/2006/math" xmlns="" val="1"/>
+              <ma14:wrappingTextBoxFlag xmlns:m="http://schemas.openxmlformats.org/officeDocument/2006/math" xmlns:a14="http://schemas.microsoft.com/office/drawing/2010/main" xmlns:ma14="http://schemas.microsoft.com/office/mac/drawingml/2011/main" xmlns="" val="1"/>
             </a:ext>
           </a:extLst>
         </p:spPr>
@@ -6210,7 +6577,7 @@
           </a:ln>
           <a:extLst>
             <a:ext uri="{C572A759-6A51-4108-AA02-DFA0A04FC94B}">
-              <ma14:wrappingTextBoxFlag xmlns:ma14="http://schemas.microsoft.com/office/mac/drawingml/2011/main" xmlns:a14="http://schemas.microsoft.com/office/drawing/2010/main" xmlns:m="http://schemas.openxmlformats.org/officeDocument/2006/math" xmlns="" val="1"/>
+              <ma14:wrappingTextBoxFlag xmlns:m="http://schemas.openxmlformats.org/officeDocument/2006/math" xmlns:a14="http://schemas.microsoft.com/office/drawing/2010/main" xmlns:ma14="http://schemas.microsoft.com/office/mac/drawingml/2011/main" xmlns="" val="1"/>
             </a:ext>
           </a:extLst>
         </p:spPr>
@@ -8697,7 +9064,7 @@
           </p:nvPr>
         </p:nvPicPr>
         <p:blipFill>
-          <a:blip r:embed="rId2"/>
+          <a:blip r:embed="rId3"/>
           <a:stretch>
             <a:fillRect/>
           </a:stretch>
@@ -14058,13 +14425,13 @@
           <a:lstStyle/>
           <a:p>
             <a:r>
-              <a:rPr lang="en-US" dirty="0">
+              <a:rPr lang="en-US">
                 <a:latin typeface="Inter"/>
                 <a:cs typeface="Poppins SemiBold"/>
               </a:rPr>
-              <a:t>Model </a:t>
+              <a:t>Model Workflow</a:t>
             </a:r>
-            <a:endParaRPr lang="en-US" dirty="0"/>
+            <a:endParaRPr lang="en-US"/>
           </a:p>
         </p:txBody>
       </p:sp>
@@ -16236,7 +16603,7 @@
           <p:nvPr/>
         </p:nvPicPr>
         <p:blipFill>
-          <a:blip r:embed="rId2"/>
+          <a:blip r:embed="rId3"/>
           <a:stretch>
             <a:fillRect/>
           </a:stretch>
